--- a/再次將我更新.pptx
+++ b/再次將我更新.pptx
@@ -169,10 +169,9 @@
           <a:lstStyle/>
           <a:p>
             <a:r>
-              <a:rPr lang="zh-TW" altLang="en-US" smtClean="0"/>
+              <a:rPr lang="zh-TW" altLang="en-US"/>
               <a:t>按一下以編輯母片標題樣式</a:t>
             </a:r>
-            <a:endParaRPr lang="zh-TW" altLang="en-US"/>
           </a:p>
         </p:txBody>
       </p:sp>
@@ -288,10 +287,9 @@
           </a:lstStyle>
           <a:p>
             <a:r>
-              <a:rPr lang="zh-TW" altLang="en-US" smtClean="0"/>
+              <a:rPr lang="zh-TW" altLang="en-US"/>
               <a:t>按一下以編輯母片副標題樣式</a:t>
             </a:r>
-            <a:endParaRPr lang="zh-TW" altLang="en-US"/>
           </a:p>
         </p:txBody>
       </p:sp>
@@ -312,7 +310,7 @@
           <a:p>
             <a:fld id="{470D6F24-AF1F-4F48-9DF5-4B4AACE7D8EF}" type="datetimeFigureOut">
               <a:rPr lang="zh-TW" altLang="en-US" smtClean="0"/>
-              <a:t>2022/4/23</a:t>
+              <a:t>2025/4/28</a:t>
             </a:fld>
             <a:endParaRPr lang="zh-TW" altLang="en-US"/>
           </a:p>
@@ -401,10 +399,9 @@
           <a:lstStyle/>
           <a:p>
             <a:r>
-              <a:rPr lang="zh-TW" altLang="en-US" smtClean="0"/>
+              <a:rPr lang="zh-TW" altLang="en-US"/>
               <a:t>按一下以編輯母片標題樣式</a:t>
             </a:r>
-            <a:endParaRPr lang="zh-TW" altLang="en-US"/>
           </a:p>
         </p:txBody>
       </p:sp>
@@ -425,38 +422,37 @@
           <a:p>
             <a:pPr lvl="0"/>
             <a:r>
-              <a:rPr lang="zh-TW" altLang="en-US" smtClean="0"/>
+              <a:rPr lang="zh-TW" altLang="en-US"/>
               <a:t>按一下以編輯母片文字樣式</a:t>
             </a:r>
           </a:p>
           <a:p>
             <a:pPr lvl="1"/>
             <a:r>
-              <a:rPr lang="zh-TW" altLang="en-US" smtClean="0"/>
+              <a:rPr lang="zh-TW" altLang="en-US"/>
               <a:t>第二層</a:t>
             </a:r>
           </a:p>
           <a:p>
             <a:pPr lvl="2"/>
             <a:r>
-              <a:rPr lang="zh-TW" altLang="en-US" smtClean="0"/>
+              <a:rPr lang="zh-TW" altLang="en-US"/>
               <a:t>第三層</a:t>
             </a:r>
           </a:p>
           <a:p>
             <a:pPr lvl="3"/>
             <a:r>
-              <a:rPr lang="zh-TW" altLang="en-US" smtClean="0"/>
+              <a:rPr lang="zh-TW" altLang="en-US"/>
               <a:t>第四層</a:t>
             </a:r>
           </a:p>
           <a:p>
             <a:pPr lvl="4"/>
             <a:r>
-              <a:rPr lang="zh-TW" altLang="en-US" smtClean="0"/>
+              <a:rPr lang="zh-TW" altLang="en-US"/>
               <a:t>第五層</a:t>
             </a:r>
-            <a:endParaRPr lang="zh-TW" altLang="en-US"/>
           </a:p>
         </p:txBody>
       </p:sp>
@@ -477,7 +473,7 @@
           <a:p>
             <a:fld id="{470D6F24-AF1F-4F48-9DF5-4B4AACE7D8EF}" type="datetimeFigureOut">
               <a:rPr lang="zh-TW" altLang="en-US" smtClean="0"/>
-              <a:t>2022/4/23</a:t>
+              <a:t>2025/4/28</a:t>
             </a:fld>
             <a:endParaRPr lang="zh-TW" altLang="en-US"/>
           </a:p>
@@ -571,10 +567,9 @@
           <a:lstStyle/>
           <a:p>
             <a:r>
-              <a:rPr lang="zh-TW" altLang="en-US" smtClean="0"/>
+              <a:rPr lang="zh-TW" altLang="en-US"/>
               <a:t>按一下以編輯母片標題樣式</a:t>
             </a:r>
-            <a:endParaRPr lang="zh-TW" altLang="en-US"/>
           </a:p>
         </p:txBody>
       </p:sp>
@@ -600,38 +595,37 @@
           <a:p>
             <a:pPr lvl="0"/>
             <a:r>
-              <a:rPr lang="zh-TW" altLang="en-US" smtClean="0"/>
+              <a:rPr lang="zh-TW" altLang="en-US"/>
               <a:t>按一下以編輯母片文字樣式</a:t>
             </a:r>
           </a:p>
           <a:p>
             <a:pPr lvl="1"/>
             <a:r>
-              <a:rPr lang="zh-TW" altLang="en-US" smtClean="0"/>
+              <a:rPr lang="zh-TW" altLang="en-US"/>
               <a:t>第二層</a:t>
             </a:r>
           </a:p>
           <a:p>
             <a:pPr lvl="2"/>
             <a:r>
-              <a:rPr lang="zh-TW" altLang="en-US" smtClean="0"/>
+              <a:rPr lang="zh-TW" altLang="en-US"/>
               <a:t>第三層</a:t>
             </a:r>
           </a:p>
           <a:p>
             <a:pPr lvl="3"/>
             <a:r>
-              <a:rPr lang="zh-TW" altLang="en-US" smtClean="0"/>
+              <a:rPr lang="zh-TW" altLang="en-US"/>
               <a:t>第四層</a:t>
             </a:r>
           </a:p>
           <a:p>
             <a:pPr lvl="4"/>
             <a:r>
-              <a:rPr lang="zh-TW" altLang="en-US" smtClean="0"/>
+              <a:rPr lang="zh-TW" altLang="en-US"/>
               <a:t>第五層</a:t>
             </a:r>
-            <a:endParaRPr lang="zh-TW" altLang="en-US"/>
           </a:p>
         </p:txBody>
       </p:sp>
@@ -652,7 +646,7 @@
           <a:p>
             <a:fld id="{470D6F24-AF1F-4F48-9DF5-4B4AACE7D8EF}" type="datetimeFigureOut">
               <a:rPr lang="zh-TW" altLang="en-US" smtClean="0"/>
-              <a:t>2022/4/23</a:t>
+              <a:t>2025/4/28</a:t>
             </a:fld>
             <a:endParaRPr lang="zh-TW" altLang="en-US"/>
           </a:p>
@@ -741,10 +735,9 @@
           <a:lstStyle/>
           <a:p>
             <a:r>
-              <a:rPr lang="zh-TW" altLang="en-US" smtClean="0"/>
+              <a:rPr lang="zh-TW" altLang="en-US"/>
               <a:t>按一下以編輯母片標題樣式</a:t>
             </a:r>
-            <a:endParaRPr lang="zh-TW" altLang="en-US"/>
           </a:p>
         </p:txBody>
       </p:sp>
@@ -765,38 +758,37 @@
           <a:p>
             <a:pPr lvl="0"/>
             <a:r>
-              <a:rPr lang="zh-TW" altLang="en-US" smtClean="0"/>
+              <a:rPr lang="zh-TW" altLang="en-US"/>
               <a:t>按一下以編輯母片文字樣式</a:t>
             </a:r>
           </a:p>
           <a:p>
             <a:pPr lvl="1"/>
             <a:r>
-              <a:rPr lang="zh-TW" altLang="en-US" smtClean="0"/>
+              <a:rPr lang="zh-TW" altLang="en-US"/>
               <a:t>第二層</a:t>
             </a:r>
           </a:p>
           <a:p>
             <a:pPr lvl="2"/>
             <a:r>
-              <a:rPr lang="zh-TW" altLang="en-US" smtClean="0"/>
+              <a:rPr lang="zh-TW" altLang="en-US"/>
               <a:t>第三層</a:t>
             </a:r>
           </a:p>
           <a:p>
             <a:pPr lvl="3"/>
             <a:r>
-              <a:rPr lang="zh-TW" altLang="en-US" smtClean="0"/>
+              <a:rPr lang="zh-TW" altLang="en-US"/>
               <a:t>第四層</a:t>
             </a:r>
           </a:p>
           <a:p>
             <a:pPr lvl="4"/>
             <a:r>
-              <a:rPr lang="zh-TW" altLang="en-US" smtClean="0"/>
+              <a:rPr lang="zh-TW" altLang="en-US"/>
               <a:t>第五層</a:t>
             </a:r>
-            <a:endParaRPr lang="zh-TW" altLang="en-US"/>
           </a:p>
         </p:txBody>
       </p:sp>
@@ -817,7 +809,7 @@
           <a:p>
             <a:fld id="{470D6F24-AF1F-4F48-9DF5-4B4AACE7D8EF}" type="datetimeFigureOut">
               <a:rPr lang="zh-TW" altLang="en-US" smtClean="0"/>
-              <a:t>2022/4/23</a:t>
+              <a:t>2025/4/28</a:t>
             </a:fld>
             <a:endParaRPr lang="zh-TW" altLang="en-US"/>
           </a:p>
@@ -915,10 +907,9 @@
           </a:lstStyle>
           <a:p>
             <a:r>
-              <a:rPr lang="zh-TW" altLang="en-US" smtClean="0"/>
+              <a:rPr lang="zh-TW" altLang="en-US"/>
               <a:t>按一下以編輯母片標題樣式</a:t>
             </a:r>
-            <a:endParaRPr lang="zh-TW" altLang="en-US"/>
           </a:p>
         </p:txBody>
       </p:sp>
@@ -1035,7 +1026,7 @@
           <a:p>
             <a:pPr lvl="0"/>
             <a:r>
-              <a:rPr lang="zh-TW" altLang="en-US" smtClean="0"/>
+              <a:rPr lang="zh-TW" altLang="en-US"/>
               <a:t>按一下以編輯母片文字樣式</a:t>
             </a:r>
           </a:p>
@@ -1058,7 +1049,7 @@
           <a:p>
             <a:fld id="{470D6F24-AF1F-4F48-9DF5-4B4AACE7D8EF}" type="datetimeFigureOut">
               <a:rPr lang="zh-TW" altLang="en-US" smtClean="0"/>
-              <a:t>2022/4/23</a:t>
+              <a:t>2025/4/28</a:t>
             </a:fld>
             <a:endParaRPr lang="zh-TW" altLang="en-US"/>
           </a:p>
@@ -1147,10 +1138,9 @@
           <a:lstStyle/>
           <a:p>
             <a:r>
-              <a:rPr lang="zh-TW" altLang="en-US" smtClean="0"/>
+              <a:rPr lang="zh-TW" altLang="en-US"/>
               <a:t>按一下以編輯母片標題樣式</a:t>
             </a:r>
-            <a:endParaRPr lang="zh-TW" altLang="en-US"/>
           </a:p>
         </p:txBody>
       </p:sp>
@@ -1204,38 +1194,37 @@
           <a:p>
             <a:pPr lvl="0"/>
             <a:r>
-              <a:rPr lang="zh-TW" altLang="en-US" smtClean="0"/>
+              <a:rPr lang="zh-TW" altLang="en-US"/>
               <a:t>按一下以編輯母片文字樣式</a:t>
             </a:r>
           </a:p>
           <a:p>
             <a:pPr lvl="1"/>
             <a:r>
-              <a:rPr lang="zh-TW" altLang="en-US" smtClean="0"/>
+              <a:rPr lang="zh-TW" altLang="en-US"/>
               <a:t>第二層</a:t>
             </a:r>
           </a:p>
           <a:p>
             <a:pPr lvl="2"/>
             <a:r>
-              <a:rPr lang="zh-TW" altLang="en-US" smtClean="0"/>
+              <a:rPr lang="zh-TW" altLang="en-US"/>
               <a:t>第三層</a:t>
             </a:r>
           </a:p>
           <a:p>
             <a:pPr lvl="3"/>
             <a:r>
-              <a:rPr lang="zh-TW" altLang="en-US" smtClean="0"/>
+              <a:rPr lang="zh-TW" altLang="en-US"/>
               <a:t>第四層</a:t>
             </a:r>
           </a:p>
           <a:p>
             <a:pPr lvl="4"/>
             <a:r>
-              <a:rPr lang="zh-TW" altLang="en-US" smtClean="0"/>
+              <a:rPr lang="zh-TW" altLang="en-US"/>
               <a:t>第五層</a:t>
             </a:r>
-            <a:endParaRPr lang="zh-TW" altLang="en-US"/>
           </a:p>
         </p:txBody>
       </p:sp>
@@ -1289,38 +1278,37 @@
           <a:p>
             <a:pPr lvl="0"/>
             <a:r>
-              <a:rPr lang="zh-TW" altLang="en-US" smtClean="0"/>
+              <a:rPr lang="zh-TW" altLang="en-US"/>
               <a:t>按一下以編輯母片文字樣式</a:t>
             </a:r>
           </a:p>
           <a:p>
             <a:pPr lvl="1"/>
             <a:r>
-              <a:rPr lang="zh-TW" altLang="en-US" smtClean="0"/>
+              <a:rPr lang="zh-TW" altLang="en-US"/>
               <a:t>第二層</a:t>
             </a:r>
           </a:p>
           <a:p>
             <a:pPr lvl="2"/>
             <a:r>
-              <a:rPr lang="zh-TW" altLang="en-US" smtClean="0"/>
+              <a:rPr lang="zh-TW" altLang="en-US"/>
               <a:t>第三層</a:t>
             </a:r>
           </a:p>
           <a:p>
             <a:pPr lvl="3"/>
             <a:r>
-              <a:rPr lang="zh-TW" altLang="en-US" smtClean="0"/>
+              <a:rPr lang="zh-TW" altLang="en-US"/>
               <a:t>第四層</a:t>
             </a:r>
           </a:p>
           <a:p>
             <a:pPr lvl="4"/>
             <a:r>
-              <a:rPr lang="zh-TW" altLang="en-US" smtClean="0"/>
+              <a:rPr lang="zh-TW" altLang="en-US"/>
               <a:t>第五層</a:t>
             </a:r>
-            <a:endParaRPr lang="zh-TW" altLang="en-US"/>
           </a:p>
         </p:txBody>
       </p:sp>
@@ -1341,7 +1329,7 @@
           <a:p>
             <a:fld id="{470D6F24-AF1F-4F48-9DF5-4B4AACE7D8EF}" type="datetimeFigureOut">
               <a:rPr lang="zh-TW" altLang="en-US" smtClean="0"/>
-              <a:t>2022/4/23</a:t>
+              <a:t>2025/4/28</a:t>
             </a:fld>
             <a:endParaRPr lang="zh-TW" altLang="en-US"/>
           </a:p>
@@ -1434,10 +1422,9 @@
           </a:lstStyle>
           <a:p>
             <a:r>
-              <a:rPr lang="zh-TW" altLang="en-US" smtClean="0"/>
+              <a:rPr lang="zh-TW" altLang="en-US"/>
               <a:t>按一下以編輯母片標題樣式</a:t>
             </a:r>
-            <a:endParaRPr lang="zh-TW" altLang="en-US"/>
           </a:p>
         </p:txBody>
       </p:sp>
@@ -1500,7 +1487,7 @@
           <a:p>
             <a:pPr lvl="0"/>
             <a:r>
-              <a:rPr lang="zh-TW" altLang="en-US" smtClean="0"/>
+              <a:rPr lang="zh-TW" altLang="en-US"/>
               <a:t>按一下以編輯母片文字樣式</a:t>
             </a:r>
           </a:p>
@@ -1556,38 +1543,37 @@
           <a:p>
             <a:pPr lvl="0"/>
             <a:r>
-              <a:rPr lang="zh-TW" altLang="en-US" smtClean="0"/>
+              <a:rPr lang="zh-TW" altLang="en-US"/>
               <a:t>按一下以編輯母片文字樣式</a:t>
             </a:r>
           </a:p>
           <a:p>
             <a:pPr lvl="1"/>
             <a:r>
-              <a:rPr lang="zh-TW" altLang="en-US" smtClean="0"/>
+              <a:rPr lang="zh-TW" altLang="en-US"/>
               <a:t>第二層</a:t>
             </a:r>
           </a:p>
           <a:p>
             <a:pPr lvl="2"/>
             <a:r>
-              <a:rPr lang="zh-TW" altLang="en-US" smtClean="0"/>
+              <a:rPr lang="zh-TW" altLang="en-US"/>
               <a:t>第三層</a:t>
             </a:r>
           </a:p>
           <a:p>
             <a:pPr lvl="3"/>
             <a:r>
-              <a:rPr lang="zh-TW" altLang="en-US" smtClean="0"/>
+              <a:rPr lang="zh-TW" altLang="en-US"/>
               <a:t>第四層</a:t>
             </a:r>
           </a:p>
           <a:p>
             <a:pPr lvl="4"/>
             <a:r>
-              <a:rPr lang="zh-TW" altLang="en-US" smtClean="0"/>
+              <a:rPr lang="zh-TW" altLang="en-US"/>
               <a:t>第五層</a:t>
             </a:r>
-            <a:endParaRPr lang="zh-TW" altLang="en-US"/>
           </a:p>
         </p:txBody>
       </p:sp>
@@ -1650,7 +1636,7 @@
           <a:p>
             <a:pPr lvl="0"/>
             <a:r>
-              <a:rPr lang="zh-TW" altLang="en-US" smtClean="0"/>
+              <a:rPr lang="zh-TW" altLang="en-US"/>
               <a:t>按一下以編輯母片文字樣式</a:t>
             </a:r>
           </a:p>
@@ -1706,38 +1692,37 @@
           <a:p>
             <a:pPr lvl="0"/>
             <a:r>
-              <a:rPr lang="zh-TW" altLang="en-US" smtClean="0"/>
+              <a:rPr lang="zh-TW" altLang="en-US"/>
               <a:t>按一下以編輯母片文字樣式</a:t>
             </a:r>
           </a:p>
           <a:p>
             <a:pPr lvl="1"/>
             <a:r>
-              <a:rPr lang="zh-TW" altLang="en-US" smtClean="0"/>
+              <a:rPr lang="zh-TW" altLang="en-US"/>
               <a:t>第二層</a:t>
             </a:r>
           </a:p>
           <a:p>
             <a:pPr lvl="2"/>
             <a:r>
-              <a:rPr lang="zh-TW" altLang="en-US" smtClean="0"/>
+              <a:rPr lang="zh-TW" altLang="en-US"/>
               <a:t>第三層</a:t>
             </a:r>
           </a:p>
           <a:p>
             <a:pPr lvl="3"/>
             <a:r>
-              <a:rPr lang="zh-TW" altLang="en-US" smtClean="0"/>
+              <a:rPr lang="zh-TW" altLang="en-US"/>
               <a:t>第四層</a:t>
             </a:r>
           </a:p>
           <a:p>
             <a:pPr lvl="4"/>
             <a:r>
-              <a:rPr lang="zh-TW" altLang="en-US" smtClean="0"/>
+              <a:rPr lang="zh-TW" altLang="en-US"/>
               <a:t>第五層</a:t>
             </a:r>
-            <a:endParaRPr lang="zh-TW" altLang="en-US"/>
           </a:p>
         </p:txBody>
       </p:sp>
@@ -1758,7 +1743,7 @@
           <a:p>
             <a:fld id="{470D6F24-AF1F-4F48-9DF5-4B4AACE7D8EF}" type="datetimeFigureOut">
               <a:rPr lang="zh-TW" altLang="en-US" smtClean="0"/>
-              <a:t>2022/4/23</a:t>
+              <a:t>2025/4/28</a:t>
             </a:fld>
             <a:endParaRPr lang="zh-TW" altLang="en-US"/>
           </a:p>
@@ -1847,10 +1832,9 @@
           <a:lstStyle/>
           <a:p>
             <a:r>
-              <a:rPr lang="zh-TW" altLang="en-US" smtClean="0"/>
+              <a:rPr lang="zh-TW" altLang="en-US"/>
               <a:t>按一下以編輯母片標題樣式</a:t>
             </a:r>
-            <a:endParaRPr lang="zh-TW" altLang="en-US"/>
           </a:p>
         </p:txBody>
       </p:sp>
@@ -1871,7 +1855,7 @@
           <a:p>
             <a:fld id="{470D6F24-AF1F-4F48-9DF5-4B4AACE7D8EF}" type="datetimeFigureOut">
               <a:rPr lang="zh-TW" altLang="en-US" smtClean="0"/>
-              <a:t>2022/4/23</a:t>
+              <a:t>2025/4/28</a:t>
             </a:fld>
             <a:endParaRPr lang="zh-TW" altLang="en-US"/>
           </a:p>
@@ -1961,7 +1945,7 @@
           <a:p>
             <a:fld id="{470D6F24-AF1F-4F48-9DF5-4B4AACE7D8EF}" type="datetimeFigureOut">
               <a:rPr lang="zh-TW" altLang="en-US" smtClean="0"/>
-              <a:t>2022/4/23</a:t>
+              <a:t>2025/4/28</a:t>
             </a:fld>
             <a:endParaRPr lang="zh-TW" altLang="en-US"/>
           </a:p>
@@ -2059,10 +2043,9 @@
           </a:lstStyle>
           <a:p>
             <a:r>
-              <a:rPr lang="zh-TW" altLang="en-US" smtClean="0"/>
+              <a:rPr lang="zh-TW" altLang="en-US"/>
               <a:t>按一下以編輯母片標題樣式</a:t>
             </a:r>
-            <a:endParaRPr lang="zh-TW" altLang="en-US"/>
           </a:p>
         </p:txBody>
       </p:sp>
@@ -2116,38 +2099,37 @@
           <a:p>
             <a:pPr lvl="0"/>
             <a:r>
-              <a:rPr lang="zh-TW" altLang="en-US" smtClean="0"/>
+              <a:rPr lang="zh-TW" altLang="en-US"/>
               <a:t>按一下以編輯母片文字樣式</a:t>
             </a:r>
           </a:p>
           <a:p>
             <a:pPr lvl="1"/>
             <a:r>
-              <a:rPr lang="zh-TW" altLang="en-US" smtClean="0"/>
+              <a:rPr lang="zh-TW" altLang="en-US"/>
               <a:t>第二層</a:t>
             </a:r>
           </a:p>
           <a:p>
             <a:pPr lvl="2"/>
             <a:r>
-              <a:rPr lang="zh-TW" altLang="en-US" smtClean="0"/>
+              <a:rPr lang="zh-TW" altLang="en-US"/>
               <a:t>第三層</a:t>
             </a:r>
           </a:p>
           <a:p>
             <a:pPr lvl="3"/>
             <a:r>
-              <a:rPr lang="zh-TW" altLang="en-US" smtClean="0"/>
+              <a:rPr lang="zh-TW" altLang="en-US"/>
               <a:t>第四層</a:t>
             </a:r>
           </a:p>
           <a:p>
             <a:pPr lvl="4"/>
             <a:r>
-              <a:rPr lang="zh-TW" altLang="en-US" smtClean="0"/>
+              <a:rPr lang="zh-TW" altLang="en-US"/>
               <a:t>第五層</a:t>
             </a:r>
-            <a:endParaRPr lang="zh-TW" altLang="en-US"/>
           </a:p>
         </p:txBody>
       </p:sp>
@@ -2210,7 +2192,7 @@
           <a:p>
             <a:pPr lvl="0"/>
             <a:r>
-              <a:rPr lang="zh-TW" altLang="en-US" smtClean="0"/>
+              <a:rPr lang="zh-TW" altLang="en-US"/>
               <a:t>按一下以編輯母片文字樣式</a:t>
             </a:r>
           </a:p>
@@ -2233,7 +2215,7 @@
           <a:p>
             <a:fld id="{470D6F24-AF1F-4F48-9DF5-4B4AACE7D8EF}" type="datetimeFigureOut">
               <a:rPr lang="zh-TW" altLang="en-US" smtClean="0"/>
-              <a:t>2022/4/23</a:t>
+              <a:t>2025/4/28</a:t>
             </a:fld>
             <a:endParaRPr lang="zh-TW" altLang="en-US"/>
           </a:p>
@@ -2331,10 +2313,9 @@
           </a:lstStyle>
           <a:p>
             <a:r>
-              <a:rPr lang="zh-TW" altLang="en-US" smtClean="0"/>
+              <a:rPr lang="zh-TW" altLang="en-US"/>
               <a:t>按一下以編輯母片標題樣式</a:t>
             </a:r>
-            <a:endParaRPr lang="zh-TW" altLang="en-US"/>
           </a:p>
         </p:txBody>
       </p:sp>
@@ -2396,10 +2377,9 @@
           </a:lstStyle>
           <a:p>
             <a:r>
-              <a:rPr lang="zh-TW" altLang="en-US" smtClean="0"/>
+              <a:rPr lang="zh-TW" altLang="en-US"/>
               <a:t>按一下圖示以新增圖片</a:t>
             </a:r>
-            <a:endParaRPr lang="zh-TW" altLang="en-US"/>
           </a:p>
         </p:txBody>
       </p:sp>
@@ -2462,7 +2442,7 @@
           <a:p>
             <a:pPr lvl="0"/>
             <a:r>
-              <a:rPr lang="zh-TW" altLang="en-US" smtClean="0"/>
+              <a:rPr lang="zh-TW" altLang="en-US"/>
               <a:t>按一下以編輯母片文字樣式</a:t>
             </a:r>
           </a:p>
@@ -2485,7 +2465,7 @@
           <a:p>
             <a:fld id="{470D6F24-AF1F-4F48-9DF5-4B4AACE7D8EF}" type="datetimeFigureOut">
               <a:rPr lang="zh-TW" altLang="en-US" smtClean="0"/>
-              <a:t>2022/4/23</a:t>
+              <a:t>2025/4/28</a:t>
             </a:fld>
             <a:endParaRPr lang="zh-TW" altLang="en-US"/>
           </a:p>
@@ -2594,10 +2574,9 @@
           <a:lstStyle/>
           <a:p>
             <a:r>
-              <a:rPr lang="zh-TW" altLang="en-US" smtClean="0"/>
+              <a:rPr lang="zh-TW" altLang="en-US"/>
               <a:t>按一下以編輯母片標題樣式</a:t>
             </a:r>
-            <a:endParaRPr lang="zh-TW" altLang="en-US"/>
           </a:p>
         </p:txBody>
       </p:sp>
@@ -2628,38 +2607,37 @@
           <a:p>
             <a:pPr lvl="0"/>
             <a:r>
-              <a:rPr lang="zh-TW" altLang="en-US" smtClean="0"/>
+              <a:rPr lang="zh-TW" altLang="en-US"/>
               <a:t>按一下以編輯母片文字樣式</a:t>
             </a:r>
           </a:p>
           <a:p>
             <a:pPr lvl="1"/>
             <a:r>
-              <a:rPr lang="zh-TW" altLang="en-US" smtClean="0"/>
+              <a:rPr lang="zh-TW" altLang="en-US"/>
               <a:t>第二層</a:t>
             </a:r>
           </a:p>
           <a:p>
             <a:pPr lvl="2"/>
             <a:r>
-              <a:rPr lang="zh-TW" altLang="en-US" smtClean="0"/>
+              <a:rPr lang="zh-TW" altLang="en-US"/>
               <a:t>第三層</a:t>
             </a:r>
           </a:p>
           <a:p>
             <a:pPr lvl="3"/>
             <a:r>
-              <a:rPr lang="zh-TW" altLang="en-US" smtClean="0"/>
+              <a:rPr lang="zh-TW" altLang="en-US"/>
               <a:t>第四層</a:t>
             </a:r>
           </a:p>
           <a:p>
             <a:pPr lvl="4"/>
             <a:r>
-              <a:rPr lang="zh-TW" altLang="en-US" smtClean="0"/>
+              <a:rPr lang="zh-TW" altLang="en-US"/>
               <a:t>第五層</a:t>
             </a:r>
-            <a:endParaRPr lang="zh-TW" altLang="en-US"/>
           </a:p>
         </p:txBody>
       </p:sp>
@@ -2698,7 +2676,7 @@
           <a:p>
             <a:fld id="{470D6F24-AF1F-4F48-9DF5-4B4AACE7D8EF}" type="datetimeFigureOut">
               <a:rPr lang="zh-TW" altLang="en-US" smtClean="0"/>
-              <a:t>2022/4/23</a:t>
+              <a:t>2025/4/28</a:t>
             </a:fld>
             <a:endParaRPr lang="zh-TW" altLang="en-US"/>
           </a:p>
@@ -3105,24 +3083,7 @@
                 <a:latin typeface="微軟正黑體" pitchFamily="34" charset="-120"/>
                 <a:ea typeface="微軟正黑體" pitchFamily="34" charset="-120"/>
               </a:rPr>
-              <a:t>再</a:t>
-            </a:r>
-            <a:r>
-              <a:rPr lang="zh-TW" altLang="en-US" sz="7200" b="1" i="1" dirty="0">
-                <a:solidFill>
-                  <a:srgbClr val="000066"/>
-                </a:solidFill>
-                <a:effectLst>
-                  <a:outerShdw blurRad="38100" dist="38100" dir="2700000" algn="tl">
-                    <a:srgbClr val="000000">
-                      <a:alpha val="43137"/>
-                    </a:srgbClr>
-                  </a:outerShdw>
-                </a:effectLst>
-                <a:latin typeface="微軟正黑體" pitchFamily="34" charset="-120"/>
-                <a:ea typeface="微軟正黑體" pitchFamily="34" charset="-120"/>
-              </a:rPr>
-              <a:t>次將我更新</a:t>
+              <a:t>再次將我更新</a:t>
             </a:r>
           </a:p>
         </p:txBody>
@@ -3265,7 +3226,7 @@
                 <a:latin typeface="Microsoft JhengHei" panose="020B0604030504040204" pitchFamily="34" charset="-120"/>
                 <a:ea typeface="Microsoft JhengHei" panose="020B0604030504040204" pitchFamily="34" charset="-120"/>
               </a:rPr>
-              <a:t>正 </a:t>
+              <a:t>正歌 </a:t>
             </a:r>
             <a:r>
               <a:rPr lang="en-US" altLang="zh-CN" sz="4267" b="1" dirty="0">
@@ -3383,13 +3344,6 @@
               </a:rPr>
               <a:t>唯有祢永遠真實</a:t>
             </a:r>
-            <a:endParaRPr lang="zh-TW" altLang="en-US" sz="6400" b="1" dirty="0">
-              <a:solidFill>
-                <a:srgbClr val="000066"/>
-              </a:solidFill>
-              <a:latin typeface="微軟正黑體" pitchFamily="34" charset="-120"/>
-              <a:ea typeface="微軟正黑體" pitchFamily="34" charset="-120"/>
-            </a:endParaRPr>
           </a:p>
         </p:txBody>
       </p:sp>
@@ -3434,7 +3388,7 @@
                 <a:latin typeface="Microsoft JhengHei" panose="020B0604030504040204" pitchFamily="34" charset="-120"/>
                 <a:ea typeface="Microsoft JhengHei" panose="020B0604030504040204" pitchFamily="34" charset="-120"/>
               </a:rPr>
-              <a:t>正 </a:t>
+              <a:t>正歌 </a:t>
             </a:r>
             <a:r>
               <a:rPr lang="en-US" altLang="zh-CN" sz="4267" b="1" dirty="0">
@@ -3603,7 +3557,7 @@
                 <a:latin typeface="Microsoft JhengHei" panose="020B0604030504040204" pitchFamily="34" charset="-120"/>
                 <a:ea typeface="Microsoft JhengHei" panose="020B0604030504040204" pitchFamily="34" charset="-120"/>
               </a:rPr>
-              <a:t>正 </a:t>
+              <a:t>正歌 </a:t>
             </a:r>
             <a:r>
               <a:rPr lang="en-US" altLang="zh-CN" sz="4267" b="1" dirty="0">
@@ -3765,7 +3719,7 @@
                 <a:latin typeface="Microsoft JhengHei" panose="020B0604030504040204" pitchFamily="34" charset="-120"/>
                 <a:ea typeface="Microsoft JhengHei" panose="020B0604030504040204" pitchFamily="34" charset="-120"/>
               </a:rPr>
-              <a:t>正 </a:t>
+              <a:t>正歌 </a:t>
             </a:r>
             <a:r>
               <a:rPr lang="en-US" altLang="zh-CN" sz="4267" b="1" dirty="0">
@@ -3934,7 +3888,7 @@
                 <a:latin typeface="Microsoft JhengHei" panose="020B0604030504040204" pitchFamily="34" charset="-120"/>
                 <a:ea typeface="Microsoft JhengHei" panose="020B0604030504040204" pitchFamily="34" charset="-120"/>
               </a:rPr>
-              <a:t>副</a:t>
+              <a:t>副歌</a:t>
             </a:r>
             <a:r>
               <a:rPr lang="en-US" sz="4267" b="1" dirty="0">
@@ -4086,7 +4040,7 @@
                 <a:latin typeface="Microsoft JhengHei" panose="020B0604030504040204" pitchFamily="34" charset="-120"/>
                 <a:ea typeface="Microsoft JhengHei" panose="020B0604030504040204" pitchFamily="34" charset="-120"/>
               </a:rPr>
-              <a:t>副</a:t>
+              <a:t>副歌</a:t>
             </a:r>
             <a:r>
               <a:rPr lang="en-US" sz="4267" b="1" dirty="0">
@@ -4245,7 +4199,7 @@
                 <a:latin typeface="Microsoft JhengHei" panose="020B0604030504040204" pitchFamily="34" charset="-120"/>
                 <a:ea typeface="Microsoft JhengHei" panose="020B0604030504040204" pitchFamily="34" charset="-120"/>
               </a:rPr>
-              <a:t>正 </a:t>
+              <a:t>正歌 </a:t>
             </a:r>
             <a:r>
               <a:rPr lang="en-US" altLang="zh-CN" sz="4267" b="1" dirty="0">
@@ -4407,7 +4361,7 @@
                 <a:latin typeface="Microsoft JhengHei" panose="020B0604030504040204" pitchFamily="34" charset="-120"/>
                 <a:ea typeface="Microsoft JhengHei" panose="020B0604030504040204" pitchFamily="34" charset="-120"/>
               </a:rPr>
-              <a:t>正 </a:t>
+              <a:t>正歌 </a:t>
             </a:r>
             <a:r>
               <a:rPr lang="en-US" altLang="zh-CN" sz="4267" b="1" dirty="0">
